--- a/Slides/4_DataSets.pptx
+++ b/Slides/4_DataSets.pptx
@@ -349,7 +349,7 @@
   <pc:docChgLst>
     <pc:chgData name="Cesar Augusto Lopez Gallego" userId="0dfa9112-9251-4882-b472-cf2dfcee09d1" providerId="ADAL" clId="{1475BFA1-A84D-4FC6-87BA-E88BCEEAA759}"/>
     <pc:docChg chg="undo custSel addSld delSld modSld sldOrd">
-      <pc:chgData name="Cesar Augusto Lopez Gallego" userId="0dfa9112-9251-4882-b472-cf2dfcee09d1" providerId="ADAL" clId="{1475BFA1-A84D-4FC6-87BA-E88BCEEAA759}" dt="2025-11-20T21:04:42.030" v="3018" actId="47"/>
+      <pc:chgData name="Cesar Augusto Lopez Gallego" userId="0dfa9112-9251-4882-b472-cf2dfcee09d1" providerId="ADAL" clId="{1475BFA1-A84D-4FC6-87BA-E88BCEEAA759}" dt="2025-11-21T01:47:44.888" v="3020" actId="313"/>
       <pc:docMkLst>
         <pc:docMk/>
       </pc:docMkLst>
@@ -928,7 +928,7 @@
         </pc:sldMkLst>
       </pc:sldChg>
       <pc:sldChg chg="addSp delSp modSp new mod">
-        <pc:chgData name="Cesar Augusto Lopez Gallego" userId="0dfa9112-9251-4882-b472-cf2dfcee09d1" providerId="ADAL" clId="{1475BFA1-A84D-4FC6-87BA-E88BCEEAA759}" dt="2025-11-20T15:28:24.251" v="1597" actId="207"/>
+        <pc:chgData name="Cesar Augusto Lopez Gallego" userId="0dfa9112-9251-4882-b472-cf2dfcee09d1" providerId="ADAL" clId="{1475BFA1-A84D-4FC6-87BA-E88BCEEAA759}" dt="2025-11-21T01:47:44.888" v="3020" actId="313"/>
         <pc:sldMkLst>
           <pc:docMk/>
           <pc:sldMk cId="2414782528" sldId="312"/>
@@ -950,7 +950,7 @@
           </ac:spMkLst>
         </pc:spChg>
         <pc:spChg chg="add mod">
-          <ac:chgData name="Cesar Augusto Lopez Gallego" userId="0dfa9112-9251-4882-b472-cf2dfcee09d1" providerId="ADAL" clId="{1475BFA1-A84D-4FC6-87BA-E88BCEEAA759}" dt="2025-11-20T15:28:24.251" v="1597" actId="207"/>
+          <ac:chgData name="Cesar Augusto Lopez Gallego" userId="0dfa9112-9251-4882-b472-cf2dfcee09d1" providerId="ADAL" clId="{1475BFA1-A84D-4FC6-87BA-E88BCEEAA759}" dt="2025-11-21T01:47:44.888" v="3020" actId="313"/>
           <ac:spMkLst>
             <pc:docMk/>
             <pc:sldMk cId="2414782528" sldId="312"/>
@@ -5504,7 +5504,7 @@
           </a:ln>
           <a:extLst>
             <a:ext uri="{C572A759-6A51-4108-AA02-DFA0A04FC94B}">
-              <ma14:wrappingTextBoxFlag xmlns:ma14="http://schemas.microsoft.com/office/mac/drawingml/2011/main" xmlns:a14="http://schemas.microsoft.com/office/drawing/2010/main" xmlns:m="http://schemas.openxmlformats.org/officeDocument/2006/math" xmlns="" val="1"/>
+              <ma14:wrappingTextBoxFlag xmlns="" xmlns:m="http://schemas.openxmlformats.org/officeDocument/2006/math" xmlns:a14="http://schemas.microsoft.com/office/drawing/2010/main" xmlns:ma14="http://schemas.microsoft.com/office/mac/drawingml/2011/main" val="1"/>
             </a:ext>
           </a:extLst>
         </p:spPr>
@@ -5541,7 +5541,7 @@
           </a:ln>
           <a:extLst>
             <a:ext uri="{C572A759-6A51-4108-AA02-DFA0A04FC94B}">
-              <ma14:wrappingTextBoxFlag xmlns:ma14="http://schemas.microsoft.com/office/mac/drawingml/2011/main" xmlns:a14="http://schemas.microsoft.com/office/drawing/2010/main" xmlns:m="http://schemas.openxmlformats.org/officeDocument/2006/math" xmlns="" val="1"/>
+              <ma14:wrappingTextBoxFlag xmlns="" xmlns:m="http://schemas.openxmlformats.org/officeDocument/2006/math" xmlns:a14="http://schemas.microsoft.com/office/drawing/2010/main" xmlns:ma14="http://schemas.microsoft.com/office/mac/drawingml/2011/main" val="1"/>
             </a:ext>
           </a:extLst>
         </p:spPr>
@@ -6401,7 +6401,7 @@
           </a:ln>
           <a:extLst>
             <a:ext uri="{C572A759-6A51-4108-AA02-DFA0A04FC94B}">
-              <ma14:wrappingTextBoxFlag xmlns:ma14="http://schemas.microsoft.com/office/mac/drawingml/2011/main" xmlns:a14="http://schemas.microsoft.com/office/drawing/2010/main" xmlns:m="http://schemas.openxmlformats.org/officeDocument/2006/math" xmlns="" val="1"/>
+              <ma14:wrappingTextBoxFlag xmlns="" xmlns:m="http://schemas.openxmlformats.org/officeDocument/2006/math" xmlns:a14="http://schemas.microsoft.com/office/drawing/2010/main" xmlns:ma14="http://schemas.microsoft.com/office/mac/drawingml/2011/main" val="1"/>
             </a:ext>
           </a:extLst>
         </p:spPr>
@@ -6828,7 +6828,15 @@
             </a:r>
             <a:r>
               <a:rPr lang="es-419" dirty="0"/>
-              <a:t>(f {bebida}")</a:t>
+              <a:t>(</a:t>
+            </a:r>
+            <a:r>
+              <a:rPr lang="es-419"/>
+              <a:t>f “{</a:t>
+            </a:r>
+            <a:r>
+              <a:rPr lang="es-419" dirty="0"/>
+              <a:t>bebida}")</a:t>
             </a:r>
           </a:p>
           <a:p>
@@ -18432,12 +18440,9 @@
 </file>
 
 <file path=customXml/item1.xml><?xml version="1.0" encoding="utf-8"?>
-<?mso-contentType ?>
-<FormTemplates xmlns="http://schemas.microsoft.com/sharepoint/v3/contenttype/forms">
-  <Display>DocumentLibraryForm</Display>
-  <Edit>DocumentLibraryForm</Edit>
-  <New>DocumentLibraryForm</New>
-</FormTemplates>
+<p:properties xmlns:p="http://schemas.microsoft.com/office/2006/metadata/properties" xmlns:xsi="http://www.w3.org/2001/XMLSchema-instance" xmlns:pc="http://schemas.microsoft.com/office/infopath/2007/PartnerControls">
+  <documentManagement/>
+</p:properties>
 </file>
 
 <file path=customXml/item2.xml><?xml version="1.0" encoding="utf-8"?>
@@ -18555,15 +18560,19 @@
 </file>
 
 <file path=customXml/item3.xml><?xml version="1.0" encoding="utf-8"?>
-<p:properties xmlns:p="http://schemas.microsoft.com/office/2006/metadata/properties" xmlns:xsi="http://www.w3.org/2001/XMLSchema-instance" xmlns:pc="http://schemas.microsoft.com/office/infopath/2007/PartnerControls">
-  <documentManagement/>
-</p:properties>
+<?mso-contentType ?>
+<FormTemplates xmlns="http://schemas.microsoft.com/sharepoint/v3/contenttype/forms">
+  <Display>DocumentLibraryForm</Display>
+  <Edit>DocumentLibraryForm</Edit>
+  <New>DocumentLibraryForm</New>
+</FormTemplates>
 </file>
 
 <file path=customXml/itemProps1.xml><?xml version="1.0" encoding="utf-8"?>
-<ds:datastoreItem xmlns:ds="http://schemas.openxmlformats.org/officeDocument/2006/customXml" ds:itemID="{77D708C8-AE8E-4398-9FF6-5496B4D2E255}">
+<ds:datastoreItem xmlns:ds="http://schemas.openxmlformats.org/officeDocument/2006/customXml" ds:itemID="{333DAE29-CB70-4C0B-B4B8-C1B6ECF352F0}">
   <ds:schemaRefs>
-    <ds:schemaRef ds:uri="http://schemas.microsoft.com/sharepoint/v3/contenttype/forms"/>
+    <ds:schemaRef ds:uri="http://schemas.microsoft.com/office/2006/metadata/properties"/>
+    <ds:schemaRef ds:uri="http://schemas.microsoft.com/office/infopath/2007/PartnerControls"/>
   </ds:schemaRefs>
 </ds:datastoreItem>
 </file>
@@ -18585,10 +18594,9 @@
 </file>
 
 <file path=customXml/itemProps3.xml><?xml version="1.0" encoding="utf-8"?>
-<ds:datastoreItem xmlns:ds="http://schemas.openxmlformats.org/officeDocument/2006/customXml" ds:itemID="{333DAE29-CB70-4C0B-B4B8-C1B6ECF352F0}">
+<ds:datastoreItem xmlns:ds="http://schemas.openxmlformats.org/officeDocument/2006/customXml" ds:itemID="{77D708C8-AE8E-4398-9FF6-5496B4D2E255}">
   <ds:schemaRefs>
-    <ds:schemaRef ds:uri="http://schemas.microsoft.com/office/2006/metadata/properties"/>
-    <ds:schemaRef ds:uri="http://schemas.microsoft.com/office/infopath/2007/PartnerControls"/>
+    <ds:schemaRef ds:uri="http://schemas.microsoft.com/sharepoint/v3/contenttype/forms"/>
   </ds:schemaRefs>
 </ds:datastoreItem>
 </file>